--- a/Nitin Tripathi Project Submission.pptx
+++ b/Nitin Tripathi Project Submission.pptx
@@ -12587,7 +12587,7 @@
                 <a:cs typeface="Times New Roman"/>
                 <a:sym typeface="Times New Roman"/>
               </a:rPr>
-              <a:t> URL –</a:t>
+              <a:t> URL –https://github.com/nitintripathi79/SRMIST_ThaiRecipe_NitinTripathi.git</a:t>
             </a:r>
           </a:p>
           <a:p>
@@ -12657,7 +12657,7 @@
                 <a:cs typeface="Times New Roman"/>
                 <a:sym typeface="Times New Roman"/>
               </a:rPr>
-              <a:t>1) </a:t>
+              <a:t>1) Thai </a:t>
             </a:r>
             <a:r>
               <a:rPr lang="en-US" sz="1850" dirty="0" err="1">
@@ -12669,7 +12669,7 @@
                 <a:cs typeface="Times New Roman"/>
                 <a:sym typeface="Times New Roman"/>
               </a:rPr>
-              <a:t>app.json</a:t>
+              <a:t>Receipe</a:t>
             </a:r>
             <a:r>
               <a:rPr lang="en-US" sz="1850" dirty="0">
@@ -12681,8 +12681,53 @@
                 <a:cs typeface="Times New Roman"/>
                 <a:sym typeface="Times New Roman"/>
               </a:rPr>
-              <a:t> file , 2) yourproblemstatement.pdf file  3) your projectpresntation.pptx file 4)any other files </a:t>
-            </a:r>
+              <a:t> </a:t>
+            </a:r>
+            <a:r>
+              <a:rPr lang="en-US" sz="1850" dirty="0" err="1">
+                <a:solidFill>
+                  <a:srgbClr val="2B3541"/>
+                </a:solidFill>
+                <a:latin typeface="Times New Roman"/>
+                <a:ea typeface="Times New Roman"/>
+                <a:cs typeface="Times New Roman"/>
+                <a:sym typeface="Times New Roman"/>
+              </a:rPr>
+              <a:t>Guidance.json</a:t>
+            </a:r>
+            <a:r>
+              <a:rPr lang="en-US" sz="1850" dirty="0">
+                <a:solidFill>
+                  <a:srgbClr val="2B3541"/>
+                </a:solidFill>
+                <a:latin typeface="Times New Roman"/>
+                <a:ea typeface="Times New Roman"/>
+                <a:cs typeface="Times New Roman"/>
+                <a:sym typeface="Times New Roman"/>
+              </a:rPr>
+              <a:t> file , 2) Nitin Tripathi </a:t>
+            </a:r>
+            <a:r>
+              <a:rPr lang="en-US" sz="1850">
+                <a:solidFill>
+                  <a:srgbClr val="2B3541"/>
+                </a:solidFill>
+                <a:latin typeface="Times New Roman"/>
+                <a:ea typeface="Times New Roman"/>
+                <a:cs typeface="Times New Roman"/>
+                <a:sym typeface="Times New Roman"/>
+              </a:rPr>
+              <a:t>Project Submission</a:t>
+            </a:r>
+            <a:endParaRPr lang="en-US" sz="1850" dirty="0">
+              <a:solidFill>
+                <a:srgbClr val="2B3541"/>
+              </a:solidFill>
+              <a:latin typeface="Times New Roman"/>
+              <a:ea typeface="Times New Roman"/>
+              <a:cs typeface="Times New Roman"/>
+              <a:sym typeface="Times New Roman"/>
+            </a:endParaRPr>
           </a:p>
           <a:p>
             <a:pPr marL="0" marR="0" lvl="0" indent="0" algn="l" rtl="0">
@@ -12930,6 +12975,69 @@
           </a:p>
         </p:txBody>
       </p:sp>
+      <p:graphicFrame>
+        <p:nvGraphicFramePr>
+          <p:cNvPr id="2" name="Object 1">
+            <a:extLst>
+              <a:ext uri="{FF2B5EF4-FFF2-40B4-BE49-F238E27FC236}">
+                <a16:creationId xmlns:a16="http://schemas.microsoft.com/office/drawing/2014/main" id="{867DCA63-71AC-435F-AFB1-824377CC7CC0}"/>
+              </a:ext>
+            </a:extLst>
+          </p:cNvPr>
+          <p:cNvGraphicFramePr>
+            <a:graphicFrameLocks noChangeAspect="1"/>
+          </p:cNvGraphicFramePr>
+          <p:nvPr>
+            <p:extLst>
+              <p:ext uri="{D42A27DB-BD31-4B8C-83A1-F6EECF244321}">
+                <p14:modId xmlns:p14="http://schemas.microsoft.com/office/powerpoint/2010/main" val="2932644971"/>
+              </p:ext>
+            </p:extLst>
+          </p:nvPr>
+        </p:nvGraphicFramePr>
+        <p:xfrm>
+          <a:off x="92075" y="92075"/>
+          <a:ext cx="1838325" cy="533400"/>
+        </p:xfrm>
+        <a:graphic>
+          <a:graphicData uri="http://schemas.openxmlformats.org/presentationml/2006/ole">
+            <mc:AlternateContent xmlns:mc="http://schemas.openxmlformats.org/markup-compatibility/2006">
+              <mc:Choice xmlns:v="urn:schemas-microsoft-com:vml" Requires="v">
+                <p:oleObj spid="_x0000_s1027" name="Packager Shell Object" showAsIcon="1" r:id="rId4" imgW="1837800" imgH="532800" progId="Package">
+                  <p:embed/>
+                </p:oleObj>
+              </mc:Choice>
+              <mc:Fallback>
+                <p:oleObj name="Packager Shell Object" showAsIcon="1" r:id="rId4" imgW="1837800" imgH="532800" progId="Package">
+                  <p:embed/>
+                  <p:pic>
+                    <p:nvPicPr>
+                      <p:cNvPr id="0" name=""/>
+                      <p:cNvPicPr/>
+                      <p:nvPr/>
+                    </p:nvPicPr>
+                    <p:blipFill>
+                      <a:blip r:embed="rId5"/>
+                      <a:stretch>
+                        <a:fillRect/>
+                      </a:stretch>
+                    </p:blipFill>
+                    <p:spPr>
+                      <a:xfrm>
+                        <a:off x="92075" y="92075"/>
+                        <a:ext cx="1838325" cy="533400"/>
+                      </a:xfrm>
+                      <a:prstGeom prst="rect">
+                        <a:avLst/>
+                      </a:prstGeom>
+                    </p:spPr>
+                  </p:pic>
+                </p:oleObj>
+              </mc:Fallback>
+            </mc:AlternateContent>
+          </a:graphicData>
+        </a:graphic>
+      </p:graphicFrame>
     </p:spTree>
     <p:extLst>
       <p:ext uri="{BB962C8B-B14F-4D97-AF65-F5344CB8AC3E}">

--- a/Nitin Tripathi Project Submission.pptx
+++ b/Nitin Tripathi Project Submission.pptx
@@ -12208,7 +12208,7 @@
         <p:spPr>
           <a:xfrm>
             <a:off x="777240" y="1207008"/>
-            <a:ext cx="11301984" cy="5293757"/>
+            <a:ext cx="11301984" cy="5016758"/>
           </a:xfrm>
           <a:prstGeom prst="rect">
             <a:avLst/>
@@ -12244,7 +12244,7 @@
             </a:r>
             <a:r>
               <a:rPr lang="en-IN" sz="1800" dirty="0"/>
-              <a:t> –single chatbot, multiple specialized agents collaborate to deliver accurate and context-aware nutrition guidance. </a:t>
+              <a:t> –single chatbot, agents collaborate to deliver accurate and context-aware Recipe. </a:t>
             </a:r>
           </a:p>
           <a:p>
@@ -12274,15 +12274,7 @@
             </a:r>
             <a:r>
               <a:rPr lang="en-IN" sz="1800" dirty="0"/>
-              <a:t> – Continuously adapts recommendations based on daily food logs and user </a:t>
-            </a:r>
-            <a:r>
-              <a:rPr lang="en-IN" sz="1800" dirty="0" err="1"/>
-              <a:t>behavior</a:t>
-            </a:r>
-            <a:r>
-              <a:rPr lang="en-IN" sz="1800" dirty="0"/>
-              <a:t>. </a:t>
+              <a:t> – Continuously adapts recommendations based on daily food logs and user behaviour. </a:t>
             </a:r>
           </a:p>
           <a:p>
@@ -12341,7 +12333,15 @@
             </a:r>
             <a:r>
               <a:rPr lang="en-IN" sz="1800" b="1" dirty="0"/>
-              <a:t>smart, adaptive, and proactive digital nutritionist</a:t>
+              <a:t>smart, adaptive, and proactive </a:t>
+            </a:r>
+            <a:r>
+              <a:rPr lang="en-IN" sz="1800" b="1" dirty="0" err="1"/>
+              <a:t>Recepi</a:t>
+            </a:r>
+            <a:r>
+              <a:rPr lang="en-IN" sz="1800" b="1" dirty="0"/>
+              <a:t> Maker</a:t>
             </a:r>
             <a:r>
               <a:rPr lang="en-IN" sz="1800" dirty="0"/>
@@ -12705,29 +12705,8 @@
                 <a:cs typeface="Times New Roman"/>
                 <a:sym typeface="Times New Roman"/>
               </a:rPr>
-              <a:t> file , 2) Nitin Tripathi </a:t>
-            </a:r>
-            <a:r>
-              <a:rPr lang="en-US" sz="1850">
-                <a:solidFill>
-                  <a:srgbClr val="2B3541"/>
-                </a:solidFill>
-                <a:latin typeface="Times New Roman"/>
-                <a:ea typeface="Times New Roman"/>
-                <a:cs typeface="Times New Roman"/>
-                <a:sym typeface="Times New Roman"/>
-              </a:rPr>
-              <a:t>Project Submission</a:t>
-            </a:r>
-            <a:endParaRPr lang="en-US" sz="1850" dirty="0">
-              <a:solidFill>
-                <a:srgbClr val="2B3541"/>
-              </a:solidFill>
-              <a:latin typeface="Times New Roman"/>
-              <a:ea typeface="Times New Roman"/>
-              <a:cs typeface="Times New Roman"/>
-              <a:sym typeface="Times New Roman"/>
-            </a:endParaRPr>
+              <a:t> file , 2) Nitin Tripathi Project Submission</a:t>
+            </a:r>
           </a:p>
           <a:p>
             <a:pPr marL="0" marR="0" lvl="0" indent="0" algn="l" rtl="0">
@@ -13003,7 +12982,7 @@
           <a:graphicData uri="http://schemas.openxmlformats.org/presentationml/2006/ole">
             <mc:AlternateContent xmlns:mc="http://schemas.openxmlformats.org/markup-compatibility/2006">
               <mc:Choice xmlns:v="urn:schemas-microsoft-com:vml" Requires="v">
-                <p:oleObj spid="_x0000_s1027" name="Packager Shell Object" showAsIcon="1" r:id="rId4" imgW="1837800" imgH="532800" progId="Package">
+                <p:oleObj spid="_x0000_s1037" name="Packager Shell Object" showAsIcon="1" r:id="rId4" imgW="1837800" imgH="532800" progId="Package">
                   <p:embed/>
                 </p:oleObj>
               </mc:Choice>
@@ -13149,7 +13128,7 @@
         <p:spPr>
           <a:xfrm>
             <a:off x="1218724" y="1221715"/>
-            <a:ext cx="9214580" cy="4277001"/>
+            <a:ext cx="9214580" cy="4592021"/>
           </a:xfrm>
           <a:prstGeom prst="rect">
             <a:avLst/>
@@ -13165,160 +13144,118 @@
           </a:bodyPr>
           <a:lstStyle/>
           <a:p>
-            <a:pPr marL="0" marR="0" lvl="0" indent="0" algn="l" rtl="0">
-              <a:lnSpc>
-                <a:spcPct val="162162"/>
-              </a:lnSpc>
-              <a:spcBef>
-                <a:spcPts val="0"/>
-              </a:spcBef>
-              <a:spcAft>
-                <a:spcPts val="0"/>
-              </a:spcAft>
-              <a:buClr>
-                <a:srgbClr val="2B3541"/>
-              </a:buClr>
-              <a:buSzPts val="1850"/>
-              <a:buFont typeface="Times New Roman"/>
-              <a:buNone/>
+            <a:r>
+              <a:rPr lang="en-US" sz="2000" b="0" u="none" strike="noStrike" dirty="0">
+                <a:effectLst/>
+                <a:latin typeface="Google Sans"/>
+              </a:rPr>
+              <a:t>The future scope for a Thai Recipe Agent (AI-powered tool, digital platform, or culinary assistant) is exceptionally strong, driven by the rapid growth of Thailand's culinary tourism market, which is projected to reach USD 179.4 billion by 2034 .</a:t>
+            </a:r>
+          </a:p>
+          <a:p>
+            <a:r>
+              <a:rPr lang="en-US" sz="2000" b="0" u="none" strike="noStrike" dirty="0">
+                <a:effectLst/>
+                <a:latin typeface="Google Sans"/>
+              </a:rPr>
+              <a:t>As Thai cuisine remains a key part of Thailand's soft power, opportunities for AI recipe agents are expanding across the following areas</a:t>
+            </a:r>
+            <a:br>
+              <a:rPr lang="en-US" sz="2000" b="0" u="none" strike="noStrike" dirty="0">
+                <a:effectLst/>
+                <a:latin typeface="Google Sans"/>
+              </a:rPr>
+            </a:br>
+            <a:endParaRPr lang="en-US" sz="2000" b="0" u="none" strike="noStrike" dirty="0">
+              <a:effectLst/>
+              <a:latin typeface="Google Sans"/>
+            </a:endParaRPr>
+          </a:p>
+          <a:p>
+            <a:pPr marL="285750" indent="-285750">
+              <a:buFont typeface="Wingdings" panose="05000000000000000000" pitchFamily="2" charset="2"/>
+              <a:buChar char="Ø"/>
             </a:pPr>
             <a:r>
-              <a:rPr lang="en-US" sz="1850" b="1" i="0" u="none" strike="noStrike" cap="none" dirty="0">
-                <a:solidFill>
-                  <a:srgbClr val="2B3541"/>
-                </a:solidFill>
-                <a:latin typeface="Times New Roman"/>
-                <a:ea typeface="Times New Roman"/>
-                <a:cs typeface="Times New Roman"/>
-                <a:sym typeface="Times New Roman"/>
-              </a:rPr>
-              <a:t>1.Integration with Wearables &amp; Health Devices – </a:t>
-            </a:r>
-          </a:p>
-          <a:p>
-            <a:pPr marL="0" marR="0" lvl="0" indent="0" algn="l" rtl="0">
-              <a:lnSpc>
-                <a:spcPct val="162162"/>
-              </a:lnSpc>
-              <a:spcBef>
-                <a:spcPts val="0"/>
-              </a:spcBef>
-              <a:spcAft>
-                <a:spcPts val="0"/>
-              </a:spcAft>
-              <a:buClr>
-                <a:srgbClr val="2B3541"/>
-              </a:buClr>
-              <a:buSzPts val="1850"/>
-              <a:buFont typeface="Times New Roman"/>
-              <a:buNone/>
+              <a:rPr lang="en-US" sz="1800" dirty="0"/>
+              <a:t>AI-Powered Personalization and Smart Recipe Systems.</a:t>
+            </a:r>
+            <a:br>
+              <a:rPr lang="en-US" sz="1800" dirty="0"/>
+            </a:br>
+            <a:endParaRPr lang="en-US" sz="1800" dirty="0"/>
+          </a:p>
+          <a:p>
+            <a:pPr marL="285750" indent="-285750">
+              <a:buFont typeface="Wingdings" panose="05000000000000000000" pitchFamily="2" charset="2"/>
+              <a:buChar char="Ø"/>
             </a:pPr>
             <a:r>
-              <a:rPr lang="en-US" sz="1850" b="0" i="0" u="none" strike="noStrike" cap="none" dirty="0">
-                <a:solidFill>
-                  <a:srgbClr val="2B3541"/>
-                </a:solidFill>
-                <a:latin typeface="Times New Roman"/>
-                <a:ea typeface="Times New Roman"/>
-                <a:cs typeface="Times New Roman"/>
-                <a:sym typeface="Times New Roman"/>
-              </a:rPr>
-              <a:t>The system can be integrated with smartwatches and fitness trackers to collect real-time data such as steps, calories burned, heart rate, and sleep patterns. This will enable the Nutrition Agent to provide more accurate and dynamic diet recommendations based on actual user activity and health metrics.</a:t>
-            </a:r>
-          </a:p>
-          <a:p>
-            <a:pPr marL="0" marR="0" lvl="0" indent="0" algn="l" rtl="0">
-              <a:lnSpc>
-                <a:spcPct val="162162"/>
-              </a:lnSpc>
-              <a:spcBef>
-                <a:spcPts val="0"/>
-              </a:spcBef>
-              <a:spcAft>
-                <a:spcPts val="0"/>
-              </a:spcAft>
-              <a:buClr>
-                <a:srgbClr val="2B3541"/>
-              </a:buClr>
-              <a:buSzPts val="1850"/>
-              <a:buFont typeface="Times New Roman"/>
-              <a:buNone/>
+              <a:rPr lang="en-US" sz="1800" dirty="0"/>
+              <a:t> </a:t>
+            </a:r>
+            <a:r>
+              <a:rPr lang="en-US" sz="1800" dirty="0" err="1"/>
+              <a:t>Gastrodiplomacy</a:t>
+            </a:r>
+            <a:r>
+              <a:rPr lang="en-US" sz="1800" dirty="0"/>
+              <a:t> and Global Expansion.</a:t>
+            </a:r>
+            <a:br>
+              <a:rPr lang="en-US" sz="1800" dirty="0"/>
+            </a:br>
+            <a:endParaRPr lang="en-US" sz="1800" dirty="0"/>
+          </a:p>
+          <a:p>
+            <a:pPr marL="285750" indent="-285750">
+              <a:buFont typeface="Wingdings" panose="05000000000000000000" pitchFamily="2" charset="2"/>
+              <a:buChar char="Ø"/>
             </a:pPr>
             <a:r>
-              <a:rPr lang="en-US" sz="1850" b="1" dirty="0">
-                <a:solidFill>
-                  <a:srgbClr val="2B3541"/>
-                </a:solidFill>
-                <a:latin typeface="Times New Roman"/>
-                <a:ea typeface="Times New Roman"/>
-                <a:cs typeface="Times New Roman"/>
-                <a:sym typeface="Times New Roman"/>
-              </a:rPr>
-              <a:t>2.</a:t>
-            </a:r>
-            <a:r>
-              <a:rPr lang="en-US" sz="1850" b="1" i="0" u="none" strike="noStrike" cap="none" dirty="0">
-                <a:solidFill>
-                  <a:srgbClr val="2B3541"/>
-                </a:solidFill>
-                <a:latin typeface="Times New Roman"/>
-                <a:ea typeface="Times New Roman"/>
-                <a:cs typeface="Times New Roman"/>
-                <a:sym typeface="Times New Roman"/>
-              </a:rPr>
-              <a:t>AI-Powered Voice Assistant &amp; Multilingual Support </a:t>
-            </a:r>
-            <a:r>
-              <a:rPr lang="en-US" sz="1850" b="0" i="0" u="none" strike="noStrike" cap="none" dirty="0">
-                <a:solidFill>
-                  <a:srgbClr val="2B3541"/>
-                </a:solidFill>
-                <a:latin typeface="Times New Roman"/>
-                <a:ea typeface="Times New Roman"/>
-                <a:cs typeface="Times New Roman"/>
-                <a:sym typeface="Times New Roman"/>
-              </a:rPr>
-              <a:t>– </a:t>
-            </a:r>
-          </a:p>
-          <a:p>
-            <a:pPr marL="0" marR="0" lvl="0" indent="0" algn="l" rtl="0">
-              <a:lnSpc>
-                <a:spcPct val="162162"/>
-              </a:lnSpc>
-              <a:spcBef>
-                <a:spcPts val="0"/>
-              </a:spcBef>
-              <a:spcAft>
-                <a:spcPts val="0"/>
-              </a:spcAft>
-              <a:buClr>
-                <a:srgbClr val="2B3541"/>
-              </a:buClr>
-              <a:buSzPts val="1850"/>
-              <a:buFont typeface="Times New Roman"/>
-              <a:buNone/>
+              <a:rPr lang="en-US" sz="1800" dirty="0" err="1"/>
+              <a:t>FoodTech</a:t>
+            </a:r>
+            <a:r>
+              <a:rPr lang="en-US" sz="1800" dirty="0"/>
+              <a:t> and Sustainability.</a:t>
+            </a:r>
+            <a:br>
+              <a:rPr lang="en-US" sz="1800" dirty="0"/>
+            </a:br>
+            <a:endParaRPr lang="en-US" sz="1800" dirty="0"/>
+          </a:p>
+          <a:p>
+            <a:pPr marL="285750" indent="-285750">
+              <a:buFont typeface="Wingdings" panose="05000000000000000000" pitchFamily="2" charset="2"/>
+              <a:buChar char="Ø"/>
             </a:pPr>
             <a:r>
-              <a:rPr lang="en-US" sz="1850" b="0" i="0" u="none" strike="noStrike" cap="none" dirty="0">
-                <a:solidFill>
-                  <a:srgbClr val="2B3541"/>
-                </a:solidFill>
-                <a:latin typeface="Times New Roman"/>
-                <a:ea typeface="Times New Roman"/>
-                <a:cs typeface="Times New Roman"/>
-                <a:sym typeface="Times New Roman"/>
-              </a:rPr>
-              <a:t>Enhancing the system with a voice-enabled assistant and support for multiple languages will improve accessibility. Users can interact naturally in their preferred language, making the solution more inclusive and suitable for diverse populations, especially in regions with varied linguistic backgrounds.</a:t>
-            </a:r>
-            <a:endParaRPr sz="1850" b="0" i="0" u="none" strike="noStrike" cap="none" dirty="0">
-              <a:solidFill>
-                <a:srgbClr val="000000"/>
-              </a:solidFill>
-              <a:latin typeface="Times New Roman"/>
-              <a:ea typeface="Times New Roman"/>
-              <a:cs typeface="Times New Roman"/>
-              <a:sym typeface="Times New Roman"/>
+              <a:rPr lang="en-US" sz="1800" dirty="0"/>
+              <a:t>Expansion in Key International Markets.</a:t>
+            </a:r>
+            <a:br>
+              <a:rPr lang="en-US" sz="1800" dirty="0"/>
+            </a:br>
+            <a:endParaRPr lang="en-US" sz="1800" dirty="0"/>
+          </a:p>
+          <a:p>
+            <a:pPr marL="285750" indent="-285750">
+              <a:buFont typeface="Wingdings" panose="05000000000000000000" pitchFamily="2" charset="2"/>
+              <a:buChar char="Ø"/>
+            </a:pPr>
+            <a:r>
+              <a:rPr lang="en-US" sz="1800" dirty="0"/>
+              <a:t>Enhanced Ingredient Accessibility.</a:t>
+            </a:r>
+          </a:p>
+          <a:p>
+            <a:endParaRPr lang="en-US" sz="1800" dirty="0"/>
+          </a:p>
+          <a:p>
+            <a:endParaRPr lang="en-US" sz="1800" b="0" u="none" strike="noStrike" dirty="0">
+              <a:effectLst/>
+              <a:latin typeface="Google Sans"/>
             </a:endParaRPr>
           </a:p>
         </p:txBody>
@@ -13371,18 +13308,6 @@
               <a:buFont typeface="Times New Roman"/>
               <a:buNone/>
             </a:pPr>
-            <a:r>
-              <a:rPr lang="en-US" sz="1850" b="0" i="0" u="none" strike="noStrike" cap="none" dirty="0">
-                <a:solidFill>
-                  <a:srgbClr val="2B3541"/>
-                </a:solidFill>
-                <a:latin typeface="Times New Roman"/>
-                <a:ea typeface="Times New Roman"/>
-                <a:cs typeface="Times New Roman"/>
-                <a:sym typeface="Times New Roman"/>
-              </a:rPr>
-              <a:t>·</a:t>
-            </a:r>
             <a:endParaRPr sz="1850" b="0" i="0" u="none" strike="noStrike" cap="none" dirty="0">
               <a:solidFill>
                 <a:srgbClr val="000000"/>
@@ -13443,18 +13368,6 @@
               <a:buFont typeface="Times New Roman"/>
               <a:buNone/>
             </a:pPr>
-            <a:r>
-              <a:rPr lang="en-US" sz="1850" b="0" i="0" u="none" strike="noStrike" cap="none" dirty="0">
-                <a:solidFill>
-                  <a:srgbClr val="2B3541"/>
-                </a:solidFill>
-                <a:latin typeface="Times New Roman"/>
-                <a:ea typeface="Times New Roman"/>
-                <a:cs typeface="Times New Roman"/>
-                <a:sym typeface="Times New Roman"/>
-              </a:rPr>
-              <a:t>·</a:t>
-            </a:r>
             <a:endParaRPr sz="1850" b="0" i="0" u="none" strike="noStrike" cap="none" dirty="0">
               <a:solidFill>
                 <a:srgbClr val="000000"/>
@@ -13515,18 +13428,6 @@
               <a:buFont typeface="Times New Roman"/>
               <a:buNone/>
             </a:pPr>
-            <a:r>
-              <a:rPr lang="en-US" sz="1850" b="0" i="0" u="none" strike="noStrike" cap="none" dirty="0">
-                <a:solidFill>
-                  <a:srgbClr val="2B3541"/>
-                </a:solidFill>
-                <a:latin typeface="Times New Roman"/>
-                <a:ea typeface="Times New Roman"/>
-                <a:cs typeface="Times New Roman"/>
-                <a:sym typeface="Times New Roman"/>
-              </a:rPr>
-              <a:t>·</a:t>
-            </a:r>
             <a:endParaRPr sz="1850" b="0" i="0" u="none" strike="noStrike" cap="none" dirty="0">
               <a:solidFill>
                 <a:srgbClr val="000000"/>
@@ -15083,7 +14984,7 @@
         <p:spPr>
           <a:xfrm>
             <a:off x="576072" y="1234440"/>
-            <a:ext cx="10607040" cy="3754874"/>
+            <a:ext cx="10607040" cy="5232202"/>
           </a:xfrm>
           <a:prstGeom prst="rect">
             <a:avLst/>
@@ -15101,27 +15002,27 @@
           </a:p>
           <a:p>
             <a:r>
-              <a:rPr lang="en-US" b="1" dirty="0"/>
+              <a:rPr lang="en-US" sz="1800" b="1" dirty="0"/>
               <a:t>Proposed Solution: Thai Recipe Agent</a:t>
             </a:r>
           </a:p>
           <a:p>
             <a:r>
-              <a:rPr lang="en-US" b="0" u="none" strike="noStrike" dirty="0">
+              <a:rPr lang="en-US" sz="1800" b="0" u="none" strike="noStrike" dirty="0">
                 <a:effectLst/>
                 <a:latin typeface="Google Sans"/>
               </a:rPr>
               <a:t>Thai recipes focus on balancing the five core flavors—</a:t>
             </a:r>
             <a:r>
-              <a:rPr lang="en-US" b="1" u="none" strike="noStrike" dirty="0">
+              <a:rPr lang="en-US" sz="1800" b="1" u="none" strike="noStrike" dirty="0">
                 <a:effectLst/>
                 <a:latin typeface="Google Sans"/>
               </a:rPr>
               <a:t>sour, bitter, salty, sweet, and spicy</a:t>
             </a:r>
             <a:r>
-              <a:rPr lang="en-US" b="0" u="none" strike="noStrike" dirty="0">
+              <a:rPr lang="en-US" sz="1800" b="0" u="none" strike="noStrike" dirty="0">
                 <a:effectLst/>
                 <a:latin typeface="Google Sans"/>
               </a:rPr>
@@ -15130,13 +15031,13 @@
           </a:p>
           <a:p>
             <a:r>
-              <a:rPr lang="en-US" b="1" u="none" strike="noStrike" dirty="0">
+              <a:rPr lang="en-US" sz="1800" b="1" u="none" strike="noStrike" dirty="0">
                 <a:effectLst/>
                 <a:latin typeface="Google Sans"/>
               </a:rPr>
               <a:t>Key Solutions for Authentic Thai Cooking</a:t>
             </a:r>
-            <a:endParaRPr lang="en-US" b="0" u="none" strike="noStrike" dirty="0">
+            <a:endParaRPr lang="en-US" sz="1800" b="0" u="none" strike="noStrike" dirty="0">
               <a:effectLst/>
               <a:latin typeface="Google Sans"/>
             </a:endParaRPr>
@@ -15147,48 +15048,18 @@
               <a:buChar char="•"/>
             </a:pPr>
             <a:r>
-              <a:rPr lang="en-US" b="1" u="none" strike="noStrike" dirty="0">
+              <a:rPr lang="en-US" sz="1800" b="1" u="none" strike="noStrike" dirty="0">
                 <a:effectLst/>
                 <a:latin typeface="Google Sans"/>
               </a:rPr>
               <a:t>Balancing Flavors:</a:t>
             </a:r>
             <a:r>
-              <a:rPr lang="en-US" b="0" u="none" strike="noStrike" dirty="0">
+              <a:rPr lang="en-US" sz="1800" b="0" u="none" strike="noStrike" dirty="0">
                 <a:effectLst/>
                 <a:latin typeface="Google Sans"/>
               </a:rPr>
-              <a:t> The core of Thai cuisine is balancing lime (sour), fish sauce (salty), palm sugar (sweet), and chilies (spicy) [</a:t>
-            </a:r>
-            <a:r>
-              <a:rPr lang="en-US" b="0" u="none" strike="noStrike" dirty="0">
-                <a:effectLst/>
-                <a:latin typeface="Google Sans"/>
-                <a:hlinkClick r:id="rId3"/>
-              </a:rPr>
-              <a:t>1</a:t>
-            </a:r>
-            <a:r>
-              <a:rPr lang="en-US" b="0" u="none" strike="noStrike" dirty="0">
-                <a:effectLst/>
-                <a:latin typeface="Google Sans"/>
-              </a:rPr>
-              <a:t>, </a:t>
-            </a:r>
-            <a:r>
-              <a:rPr lang="en-US" b="0" u="none" strike="noStrike" dirty="0">
-                <a:effectLst/>
-                <a:latin typeface="Google Sans"/>
-                <a:hlinkClick r:id="rId4"/>
-              </a:rPr>
-              <a:t>2</a:t>
-            </a:r>
-            <a:r>
-              <a:rPr lang="en-US" b="0" u="none" strike="noStrike" dirty="0">
-                <a:effectLst/>
-                <a:latin typeface="Google Sans"/>
-              </a:rPr>
-              <a:t>].</a:t>
+              <a:t> The core of Thai cuisine is balancing lime (sour), fish sauce (salty), palm sugar (sweet), and chilies (spicy) .</a:t>
             </a:r>
           </a:p>
           <a:p>
@@ -15197,56 +15068,56 @@
               <a:buChar char="•"/>
             </a:pPr>
             <a:r>
-              <a:rPr lang="en-US" b="1" u="none" strike="noStrike" dirty="0">
+              <a:rPr lang="en-US" sz="1800" b="1" u="none" strike="noStrike" dirty="0">
                 <a:effectLst/>
                 <a:latin typeface="Google Sans"/>
               </a:rPr>
               <a:t>The Secret Weapon (Nam </a:t>
             </a:r>
             <a:r>
-              <a:rPr lang="en-US" b="1" u="none" strike="noStrike" dirty="0" err="1">
+              <a:rPr lang="en-US" sz="1800" b="1" u="none" strike="noStrike" dirty="0" err="1">
                 <a:effectLst/>
                 <a:latin typeface="Google Sans"/>
               </a:rPr>
               <a:t>Prik</a:t>
             </a:r>
             <a:r>
-              <a:rPr lang="en-US" b="1" u="none" strike="noStrike" dirty="0">
+              <a:rPr lang="en-US" sz="1800" b="1" u="none" strike="noStrike" dirty="0">
                 <a:effectLst/>
                 <a:latin typeface="Google Sans"/>
               </a:rPr>
               <a:t> Pao):</a:t>
             </a:r>
             <a:r>
-              <a:rPr lang="en-US" b="0" u="none" strike="noStrike" dirty="0">
+              <a:rPr lang="en-US" sz="1800" b="0" u="none" strike="noStrike" dirty="0">
                 <a:effectLst/>
                 <a:latin typeface="Google Sans"/>
               </a:rPr>
               <a:t> Thai chili paste (</a:t>
             </a:r>
             <a:r>
-              <a:rPr lang="en-US" b="0" u="none" strike="noStrike" dirty="0" err="1">
+              <a:rPr lang="en-US" sz="1800" b="0" u="none" strike="noStrike" dirty="0" err="1">
                 <a:effectLst/>
                 <a:latin typeface="Google Sans"/>
               </a:rPr>
               <a:t>nam</a:t>
             </a:r>
             <a:r>
-              <a:rPr lang="en-US" b="0" u="none" strike="noStrike" dirty="0">
+              <a:rPr lang="en-US" sz="1800" b="0" u="none" strike="noStrike" dirty="0">
                 <a:effectLst/>
                 <a:latin typeface="Google Sans"/>
               </a:rPr>
               <a:t> </a:t>
             </a:r>
             <a:r>
-              <a:rPr lang="en-US" b="0" u="none" strike="noStrike" dirty="0" err="1">
+              <a:rPr lang="en-US" sz="1800" b="0" u="none" strike="noStrike" dirty="0" err="1">
                 <a:effectLst/>
                 <a:latin typeface="Google Sans"/>
               </a:rPr>
               <a:t>prik</a:t>
             </a:r>
             <a:r>
-              <a:rPr lang="en-US" b="0" u="none" strike="noStrike" dirty="0">
+              <a:rPr lang="en-US" sz="1800" b="0" u="none" strike="noStrike" dirty="0">
                 <a:effectLst/>
                 <a:latin typeface="Google Sans"/>
               </a:rPr>
@@ -15259,14 +15130,14 @@
               <a:buChar char="•"/>
             </a:pPr>
             <a:r>
-              <a:rPr lang="en-US" b="1" u="none" strike="noStrike" dirty="0">
+              <a:rPr lang="en-US" sz="1800" b="1" u="none" strike="noStrike" dirty="0">
                 <a:effectLst/>
                 <a:latin typeface="Google Sans"/>
               </a:rPr>
               <a:t>Making Curry Paste:</a:t>
             </a:r>
             <a:r>
-              <a:rPr lang="en-US" b="0" u="none" strike="noStrike" dirty="0">
+              <a:rPr lang="en-US" sz="1800" b="0" u="none" strike="noStrike" dirty="0">
                 <a:effectLst/>
                 <a:latin typeface="Google Sans"/>
               </a:rPr>
@@ -15279,14 +15150,14 @@
               <a:buChar char="•"/>
             </a:pPr>
             <a:r>
-              <a:rPr lang="en-US" b="1" u="none" strike="noStrike" dirty="0">
+              <a:rPr lang="en-US" sz="1800" b="1" u="none" strike="noStrike" dirty="0">
                 <a:effectLst/>
                 <a:latin typeface="Google Sans"/>
               </a:rPr>
               <a:t>Adjusting Spice Level:</a:t>
             </a:r>
             <a:r>
-              <a:rPr lang="en-US" b="0" u="none" strike="noStrike" dirty="0">
+              <a:rPr lang="en-US" sz="1800" b="0" u="none" strike="noStrike" dirty="0">
                 <a:effectLst/>
                 <a:latin typeface="Google Sans"/>
               </a:rPr>
@@ -15299,14 +15170,14 @@
               <a:buChar char="•"/>
             </a:pPr>
             <a:r>
-              <a:rPr lang="en-US" b="1" u="none" strike="noStrike" dirty="0">
+              <a:rPr lang="en-US" sz="1800" b="1" u="none" strike="noStrike" dirty="0">
                 <a:effectLst/>
                 <a:latin typeface="Google Sans"/>
               </a:rPr>
               <a:t>Easy Ingredient Substitutions:</a:t>
             </a:r>
             <a:r>
-              <a:rPr lang="en-US" b="0" u="none" strike="noStrike" dirty="0">
+              <a:rPr lang="en-US" sz="1800" b="0" u="none" strike="noStrike" dirty="0">
                 <a:effectLst/>
                 <a:latin typeface="Google Sans"/>
               </a:rPr>
@@ -15319,14 +15190,14 @@
               <a:buChar char="•"/>
             </a:pPr>
             <a:r>
-              <a:rPr lang="en-US" b="1" u="none" strike="noStrike" dirty="0">
+              <a:rPr lang="en-US" sz="1800" b="1" u="none" strike="noStrike" dirty="0">
                 <a:effectLst/>
                 <a:latin typeface="Google Sans"/>
               </a:rPr>
               <a:t>Simplifying Pad Thai:</a:t>
             </a:r>
             <a:r>
-              <a:rPr lang="en-US" b="0" u="none" strike="noStrike" dirty="0">
+              <a:rPr lang="en-US" sz="1800" b="0" u="none" strike="noStrike" dirty="0">
                 <a:effectLst/>
                 <a:latin typeface="Google Sans"/>
               </a:rPr>
@@ -15335,7 +15206,7 @@
           </a:p>
           <a:p>
             <a:pPr fontAlgn="base"/>
-            <a:endParaRPr lang="en-US" dirty="0"/>
+            <a:endParaRPr lang="en-US" sz="1800" dirty="0"/>
           </a:p>
           <a:p>
             <a:endParaRPr lang="en-IN" dirty="0"/>
@@ -15867,7 +15738,7 @@
         <p:spPr>
           <a:xfrm>
             <a:off x="474822" y="863187"/>
-            <a:ext cx="8758825" cy="5047536"/>
+            <a:ext cx="8758825" cy="4832092"/>
           </a:xfrm>
           <a:prstGeom prst="rect">
             <a:avLst/>
@@ -15919,11 +15790,15 @@
           <a:p>
             <a:r>
               <a:rPr lang="en-US" b="1" dirty="0"/>
-              <a:t>3) Name of IBM Granite model - </a:t>
+              <a:t>3) Name of IBM Granite model – </a:t>
+            </a:r>
+            <a:r>
+              <a:rPr lang="en-US" dirty="0" err="1"/>
+              <a:t>ibm</a:t>
             </a:r>
             <a:r>
               <a:rPr lang="en-US" dirty="0"/>
-              <a:t>Granite-4.0-8B-Instruct → Fast, efficient for real-time diet recommendations</a:t>
+              <a:t>/granite-4-h-small → Fast, efficient for real-time diet recommendations</a:t>
             </a:r>
           </a:p>
           <a:p>
@@ -16340,7 +16215,7 @@
         <p:spPr>
           <a:xfrm>
             <a:off x="621792" y="1167493"/>
-            <a:ext cx="7406640" cy="2893100"/>
+            <a:ext cx="7406640" cy="4801314"/>
           </a:xfrm>
           <a:prstGeom prst="rect">
             <a:avLst/>
@@ -16354,27 +16229,27 @@
           <a:lstStyle/>
           <a:p>
             <a:r>
-              <a:rPr lang="en-US" b="1" dirty="0"/>
+              <a:rPr lang="en-US" sz="1800" b="1" dirty="0"/>
               <a:t>Role of Agentic AI in Thai Recipe Agent</a:t>
             </a:r>
           </a:p>
           <a:p>
             <a:r>
-              <a:rPr lang="en-US" b="0" u="none" strike="noStrike" dirty="0">
+              <a:rPr lang="en-US" sz="1800" b="0" u="none" strike="noStrike" dirty="0">
                 <a:effectLst/>
                 <a:latin typeface="Google Sans"/>
               </a:rPr>
               <a:t>Agentic AI in a Thai Recipe Agent elevates it from a passive recipe database into an </a:t>
             </a:r>
             <a:r>
-              <a:rPr lang="en-US" b="1" u="none" strike="noStrike" dirty="0">
+              <a:rPr lang="en-US" sz="1800" b="1" u="none" strike="noStrike" dirty="0">
                 <a:effectLst/>
                 <a:latin typeface="Google Sans"/>
               </a:rPr>
               <a:t>autonomous kitchen assistant</a:t>
             </a:r>
             <a:r>
-              <a:rPr lang="en-US" b="0" u="none" strike="noStrike" dirty="0">
+              <a:rPr lang="en-US" sz="1800" b="0" u="none" strike="noStrike" dirty="0">
                 <a:effectLst/>
                 <a:latin typeface="Google Sans"/>
               </a:rPr>
@@ -16383,7 +16258,7 @@
           </a:p>
           <a:p>
             <a:r>
-              <a:rPr lang="en-US" b="0" u="none" strike="noStrike" dirty="0">
+              <a:rPr lang="en-US" sz="1800" b="0" u="none" strike="noStrike" dirty="0">
                 <a:effectLst/>
                 <a:latin typeface="Google Sans"/>
               </a:rPr>
@@ -16392,7 +16267,7 @@
           </a:p>
           <a:p>
             <a:r>
-              <a:rPr lang="en-US" b="1" u="none" strike="noStrike" dirty="0">
+              <a:rPr lang="en-US" sz="1800" b="1" u="none" strike="noStrike" dirty="0">
                 <a:effectLst/>
                 <a:latin typeface="Google Sans"/>
               </a:rPr>
@@ -16401,7 +16276,7 @@
           </a:p>
           <a:p>
             <a:r>
-              <a:rPr lang="en-US" b="0" u="none" strike="noStrike" dirty="0">
+              <a:rPr lang="en-US" sz="1800" b="0" u="none" strike="noStrike" dirty="0">
                 <a:effectLst/>
                 <a:latin typeface="Google Sans"/>
               </a:rPr>
@@ -16414,14 +16289,14 @@
               <a:buChar char="•"/>
             </a:pPr>
             <a:r>
-              <a:rPr lang="en-US" b="1" u="none" strike="noStrike" dirty="0">
+              <a:rPr lang="en-US" sz="1800" b="1" u="none" strike="noStrike" dirty="0">
                 <a:effectLst/>
                 <a:latin typeface="Google Sans"/>
               </a:rPr>
               <a:t>Menu Planning:</a:t>
             </a:r>
             <a:r>
-              <a:rPr lang="en-US" b="0" u="none" strike="noStrike" dirty="0">
+              <a:rPr lang="en-US" sz="1800" b="0" u="none" strike="noStrike" dirty="0">
                 <a:effectLst/>
                 <a:latin typeface="Google Sans"/>
               </a:rPr>
@@ -16434,14 +16309,14 @@
               <a:buChar char="•"/>
             </a:pPr>
             <a:r>
-              <a:rPr lang="en-US" b="1" u="none" strike="noStrike" dirty="0">
+              <a:rPr lang="en-US" sz="1800" b="1" u="none" strike="noStrike" dirty="0">
                 <a:effectLst/>
                 <a:latin typeface="Google Sans"/>
               </a:rPr>
               <a:t>Constraint Handling:</a:t>
             </a:r>
             <a:r>
-              <a:rPr lang="en-US" b="0" u="none" strike="noStrike" dirty="0">
+              <a:rPr lang="en-US" sz="1800" b="0" u="none" strike="noStrike" dirty="0">
                 <a:effectLst/>
                 <a:latin typeface="Google Sans"/>
               </a:rPr>
@@ -16449,10 +16324,7 @@
             </a:r>
           </a:p>
           <a:p>
-            <a:r>
-              <a:rPr lang="en-US" dirty="0"/>
-              <a:t>.</a:t>
-            </a:r>
+            <a:endParaRPr lang="en-US" sz="1800" dirty="0"/>
           </a:p>
         </p:txBody>
       </p:sp>

--- a/Nitin Tripathi Project Submission.pptx
+++ b/Nitin Tripathi Project Submission.pptx
@@ -12035,7 +12035,7 @@
             </a:r>
             <a:r>
               <a:rPr lang="en-US" sz="1800" dirty="0"/>
-              <a:t>– It provides the infrastructure to build, deploy, and scale the Nutrition Agent efficiently. IBM Cloud enables a </a:t>
+              <a:t>– It provides the infrastructure to build, deploy, and scale the Thai Recipe Agent efficiently. IBM Cloud enables a </a:t>
             </a:r>
             <a:r>
               <a:rPr lang="en-US" sz="1800" b="1" dirty="0"/>
@@ -12043,7 +12043,7 @@
             </a:r>
             <a:r>
               <a:rPr lang="en-US" sz="1800" dirty="0"/>
-              <a:t> for deploying the Nutrition Agent.</a:t>
+              <a:t> for deploying the Thai Recipe Agent.</a:t>
             </a:r>
           </a:p>
           <a:p>
@@ -12072,7 +12072,7 @@
             </a:r>
             <a:r>
               <a:rPr lang="en-US" sz="1800" dirty="0"/>
-              <a:t>, making the Nutrition Agent more trustworthy and effective.</a:t>
+              <a:t>, making the Thai Recipe Agent more trustworthy and effective.</a:t>
             </a:r>
           </a:p>
           <a:p>
@@ -12333,15 +12333,7 @@
             </a:r>
             <a:r>
               <a:rPr lang="en-IN" sz="1800" b="1" dirty="0"/>
-              <a:t>smart, adaptive, and proactive </a:t>
-            </a:r>
-            <a:r>
-              <a:rPr lang="en-IN" sz="1800" b="1" dirty="0" err="1"/>
-              <a:t>Recepi</a:t>
-            </a:r>
-            <a:r>
-              <a:rPr lang="en-IN" sz="1800" b="1" dirty="0"/>
-              <a:t> Maker</a:t>
+              <a:t>smart, adaptive, and proactive Recipe Maker</a:t>
             </a:r>
             <a:r>
               <a:rPr lang="en-IN" sz="1800" dirty="0"/>
@@ -12481,90 +12473,15 @@
           </a:bodyPr>
           <a:lstStyle/>
           <a:p>
-            <a:pPr marL="0" marR="0" lvl="0" indent="0" algn="l" rtl="0">
+            <a:pPr lvl="0">
               <a:lnSpc>
                 <a:spcPct val="162162"/>
               </a:lnSpc>
-              <a:spcBef>
-                <a:spcPts val="0"/>
-              </a:spcBef>
-              <a:spcAft>
-                <a:spcPts val="0"/>
-              </a:spcAft>
               <a:buClr>
                 <a:srgbClr val="2B3541"/>
               </a:buClr>
               <a:buSzPts val="1850"/>
-              <a:buFont typeface="Times New Roman"/>
-              <a:buNone/>
             </a:pPr>
-            <a:r>
-              <a:rPr lang="en-US" sz="1850" b="0" i="0" u="none" strike="noStrike" cap="none" dirty="0">
-                <a:solidFill>
-                  <a:srgbClr val="2B3541"/>
-                </a:solidFill>
-                <a:latin typeface="Times New Roman"/>
-                <a:ea typeface="Times New Roman"/>
-                <a:cs typeface="Times New Roman"/>
-                <a:sym typeface="Times New Roman"/>
-              </a:rPr>
-              <a:t>· Please create public </a:t>
-            </a:r>
-            <a:r>
-              <a:rPr lang="en-US" sz="1850" b="0" i="0" u="none" strike="noStrike" cap="none" dirty="0" err="1">
-                <a:solidFill>
-                  <a:srgbClr val="2B3541"/>
-                </a:solidFill>
-                <a:latin typeface="Times New Roman"/>
-                <a:ea typeface="Times New Roman"/>
-                <a:cs typeface="Times New Roman"/>
-                <a:sym typeface="Times New Roman"/>
-              </a:rPr>
-              <a:t>github</a:t>
-            </a:r>
-            <a:r>
-              <a:rPr lang="en-US" sz="1850" b="0" i="0" u="none" strike="noStrike" cap="none" dirty="0">
-                <a:solidFill>
-                  <a:srgbClr val="2B3541"/>
-                </a:solidFill>
-                <a:latin typeface="Times New Roman"/>
-                <a:ea typeface="Times New Roman"/>
-                <a:cs typeface="Times New Roman"/>
-                <a:sym typeface="Times New Roman"/>
-              </a:rPr>
-              <a:t> repository (Enable Add README  button while creating repository) with format – </a:t>
-            </a:r>
-          </a:p>
-          <a:p>
-            <a:pPr marL="0" marR="0" lvl="0" indent="0" algn="l" rtl="0">
-              <a:lnSpc>
-                <a:spcPct val="162162"/>
-              </a:lnSpc>
-              <a:spcBef>
-                <a:spcPts val="0"/>
-              </a:spcBef>
-              <a:spcAft>
-                <a:spcPts val="0"/>
-              </a:spcAft>
-              <a:buClr>
-                <a:srgbClr val="2B3541"/>
-              </a:buClr>
-              <a:buSzPts val="1850"/>
-              <a:buFont typeface="Times New Roman"/>
-              <a:buNone/>
-            </a:pPr>
-            <a:r>
-              <a:rPr lang="en-US" sz="1850" dirty="0">
-                <a:solidFill>
-                  <a:srgbClr val="2B3541"/>
-                </a:solidFill>
-                <a:latin typeface="Times New Roman"/>
-                <a:ea typeface="Times New Roman"/>
-                <a:cs typeface="Times New Roman"/>
-                <a:sym typeface="Times New Roman"/>
-              </a:rPr>
-              <a:t>Please test and Paste the working  </a:t>
-            </a:r>
             <a:r>
               <a:rPr lang="en-US" sz="1850" dirty="0" err="1">
                 <a:solidFill>
@@ -12587,8 +12504,30 @@
                 <a:cs typeface="Times New Roman"/>
                 <a:sym typeface="Times New Roman"/>
               </a:rPr>
-              <a:t> URL –https://github.com/nitintripathi79/SRMIST_ThaiRecipe_NitinTripathi.git</a:t>
-            </a:r>
+              <a:t> URL –</a:t>
+            </a:r>
+            <a:r>
+              <a:rPr lang="en-US" sz="1850" dirty="0">
+                <a:solidFill>
+                  <a:srgbClr val="2B3541"/>
+                </a:solidFill>
+                <a:latin typeface="Times New Roman"/>
+                <a:ea typeface="Times New Roman"/>
+                <a:cs typeface="Times New Roman"/>
+                <a:sym typeface="Times New Roman"/>
+                <a:hlinkClick r:id="rId4"/>
+              </a:rPr>
+              <a:t>https://github.com/nitintripathi79/SRMIST_ThaiRecipe_NitinTripathi.git</a:t>
+            </a:r>
+            <a:endParaRPr lang="en-US" sz="1850" dirty="0">
+              <a:solidFill>
+                <a:srgbClr val="2B3541"/>
+              </a:solidFill>
+              <a:latin typeface="Times New Roman"/>
+              <a:ea typeface="Times New Roman"/>
+              <a:cs typeface="Times New Roman"/>
+              <a:sym typeface="Times New Roman"/>
+            </a:endParaRPr>
           </a:p>
           <a:p>
             <a:pPr lvl="0">
@@ -12601,42 +12540,6 @@
               <a:buSzPts val="1850"/>
             </a:pPr>
             <a:r>
-              <a:rPr lang="en-US" sz="1850" b="1" dirty="0">
-                <a:solidFill>
-                  <a:srgbClr val="2B3541"/>
-                </a:solidFill>
-                <a:latin typeface="Times New Roman"/>
-                <a:ea typeface="Times New Roman"/>
-                <a:cs typeface="Times New Roman"/>
-                <a:sym typeface="Times New Roman"/>
-              </a:rPr>
-              <a:t>Make sure you have Uploaded following three files into your </a:t>
-            </a:r>
-            <a:r>
-              <a:rPr lang="en-US" sz="1850" b="1" dirty="0" err="1">
-                <a:solidFill>
-                  <a:srgbClr val="2B3541"/>
-                </a:solidFill>
-                <a:latin typeface="Times New Roman"/>
-                <a:ea typeface="Times New Roman"/>
-                <a:cs typeface="Times New Roman"/>
-                <a:sym typeface="Times New Roman"/>
-              </a:rPr>
-              <a:t>github</a:t>
-            </a:r>
-            <a:r>
-              <a:rPr lang="en-US" sz="1850" b="1" dirty="0">
-                <a:solidFill>
-                  <a:srgbClr val="2B3541"/>
-                </a:solidFill>
-                <a:latin typeface="Times New Roman"/>
-                <a:ea typeface="Times New Roman"/>
-                <a:cs typeface="Times New Roman"/>
-                <a:sym typeface="Times New Roman"/>
-              </a:rPr>
-              <a:t> repository  </a:t>
-            </a:r>
-            <a:br>
               <a:rPr lang="en-US" sz="1850" dirty="0">
                 <a:solidFill>
                   <a:srgbClr val="2B3541"/>
@@ -12646,18 +12549,7 @@
                 <a:cs typeface="Times New Roman"/>
                 <a:sym typeface="Times New Roman"/>
               </a:rPr>
-            </a:br>
-            <a:r>
-              <a:rPr lang="en-US" sz="1850" dirty="0">
-                <a:solidFill>
-                  <a:srgbClr val="2B3541"/>
-                </a:solidFill>
-                <a:latin typeface="Times New Roman"/>
-                <a:ea typeface="Times New Roman"/>
-                <a:cs typeface="Times New Roman"/>
-                <a:sym typeface="Times New Roman"/>
-              </a:rPr>
-              <a:t>1) Thai </a:t>
+              <a:t> Json File -Thai </a:t>
             </a:r>
             <a:r>
               <a:rPr lang="en-US" sz="1850" dirty="0" err="1">
@@ -12705,89 +12597,21 @@
                 <a:cs typeface="Times New Roman"/>
                 <a:sym typeface="Times New Roman"/>
               </a:rPr>
-              <a:t> file , 2) Nitin Tripathi Project Submission</a:t>
-            </a:r>
-          </a:p>
-          <a:p>
-            <a:pPr marL="0" marR="0" lvl="0" indent="0" algn="l" rtl="0">
+              <a:t> file </a:t>
+            </a:r>
+          </a:p>
+          <a:p>
+            <a:pPr lvl="0">
               <a:lnSpc>
                 <a:spcPct val="162162"/>
               </a:lnSpc>
-              <a:spcBef>
-                <a:spcPts val="0"/>
-              </a:spcBef>
-              <a:spcAft>
-                <a:spcPts val="0"/>
-              </a:spcAft>
               <a:buClr>
                 <a:srgbClr val="2B3541"/>
               </a:buClr>
               <a:buSzPts val="1850"/>
-              <a:buFont typeface="Times New Roman"/>
-              <a:buNone/>
             </a:pPr>
-            <a:endParaRPr sz="1850" b="0" i="0" u="none" strike="noStrike" cap="none" dirty="0">
-              <a:solidFill>
-                <a:srgbClr val="000000"/>
-              </a:solidFill>
-              <a:latin typeface="Times New Roman"/>
-              <a:ea typeface="Times New Roman"/>
-              <a:cs typeface="Times New Roman"/>
-              <a:sym typeface="Times New Roman"/>
-            </a:endParaRPr>
-          </a:p>
-        </p:txBody>
-      </p:sp>
-      <p:sp>
-        <p:nvSpPr>
-          <p:cNvPr id="280" name="Google Shape;280;p18">
-            <a:extLst>
-              <a:ext uri="{FF2B5EF4-FFF2-40B4-BE49-F238E27FC236}">
-                <a16:creationId xmlns:a16="http://schemas.microsoft.com/office/drawing/2014/main" id="{E228982D-BF81-530A-CBA1-E897A3CA8EF7}"/>
-              </a:ext>
-            </a:extLst>
-          </p:cNvPr>
-          <p:cNvSpPr/>
-          <p:nvPr/>
-        </p:nvSpPr>
-        <p:spPr>
-          <a:xfrm>
-            <a:off x="1218724" y="3360216"/>
-            <a:ext cx="7468553" cy="766048"/>
-          </a:xfrm>
-          <a:prstGeom prst="rect">
-            <a:avLst/>
-          </a:prstGeom>
-          <a:noFill/>
-          <a:ln>
-            <a:noFill/>
-          </a:ln>
-        </p:spPr>
-        <p:txBody>
-          <a:bodyPr spcFirstLastPara="1" wrap="square" lIns="0" tIns="0" rIns="0" bIns="0" anchor="t" anchorCtr="0">
-            <a:noAutofit/>
-          </a:bodyPr>
-          <a:lstStyle/>
-          <a:p>
-            <a:pPr marL="0" marR="0" lvl="0" indent="0" algn="l" rtl="0">
-              <a:lnSpc>
-                <a:spcPct val="162162"/>
-              </a:lnSpc>
-              <a:spcBef>
-                <a:spcPts val="0"/>
-              </a:spcBef>
-              <a:spcAft>
-                <a:spcPts val="0"/>
-              </a:spcAft>
-              <a:buClr>
-                <a:srgbClr val="2B3541"/>
-              </a:buClr>
-              <a:buSzPts val="1850"/>
-              <a:buFont typeface="Times New Roman"/>
-              <a:buNone/>
-            </a:pPr>
-            <a:r>
-              <a:rPr lang="en-US" sz="1850" b="0" i="0" u="none" strike="noStrike" cap="none" dirty="0">
+            <a:r>
+              <a:rPr lang="en-US" sz="1850" dirty="0">
                 <a:solidFill>
                   <a:srgbClr val="2B3541"/>
                 </a:solidFill>
@@ -12796,9 +12620,33 @@
                 <a:cs typeface="Times New Roman"/>
                 <a:sym typeface="Times New Roman"/>
               </a:rPr>
-              <a:t>·</a:t>
-            </a:r>
-            <a:endParaRPr sz="1850" b="0" i="0" u="none" strike="noStrike" cap="none" dirty="0">
+              <a:t> </a:t>
+            </a:r>
+            <a:r>
+              <a:rPr lang="en-US" sz="1850" dirty="0" err="1">
+                <a:solidFill>
+                  <a:srgbClr val="2B3541"/>
+                </a:solidFill>
+                <a:latin typeface="Times New Roman"/>
+                <a:ea typeface="Times New Roman"/>
+                <a:cs typeface="Times New Roman"/>
+                <a:sym typeface="Times New Roman"/>
+              </a:rPr>
+              <a:t>powerpoint</a:t>
+            </a:r>
+            <a:r>
+              <a:rPr lang="en-US" sz="1850" dirty="0">
+                <a:solidFill>
+                  <a:srgbClr val="2B3541"/>
+                </a:solidFill>
+                <a:latin typeface="Times New Roman"/>
+                <a:ea typeface="Times New Roman"/>
+                <a:cs typeface="Times New Roman"/>
+                <a:sym typeface="Times New Roman"/>
+              </a:rPr>
+              <a:t> presentation Nitin Tripathi Project Submission.pptx</a:t>
+            </a:r>
+            <a:endParaRPr lang="en-US" sz="1850" b="0" i="0" u="none" strike="noStrike" cap="none" dirty="0">
               <a:solidFill>
                 <a:srgbClr val="000000"/>
               </a:solidFill>
@@ -12969,25 +12817,25 @@
           <p:nvPr>
             <p:extLst>
               <p:ext uri="{D42A27DB-BD31-4B8C-83A1-F6EECF244321}">
-                <p14:modId xmlns:p14="http://schemas.microsoft.com/office/powerpoint/2010/main" val="2932644971"/>
+                <p14:modId xmlns:p14="http://schemas.microsoft.com/office/powerpoint/2010/main" val="3833204531"/>
               </p:ext>
             </p:extLst>
           </p:nvPr>
         </p:nvGraphicFramePr>
         <p:xfrm>
-          <a:off x="92075" y="92075"/>
+          <a:off x="5412221" y="1622597"/>
           <a:ext cx="1838325" cy="533400"/>
         </p:xfrm>
         <a:graphic>
           <a:graphicData uri="http://schemas.openxmlformats.org/presentationml/2006/ole">
             <mc:AlternateContent xmlns:mc="http://schemas.openxmlformats.org/markup-compatibility/2006">
               <mc:Choice xmlns:v="urn:schemas-microsoft-com:vml" Requires="v">
-                <p:oleObj spid="_x0000_s1037" name="Packager Shell Object" showAsIcon="1" r:id="rId4" imgW="1837800" imgH="532800" progId="Package">
+                <p:oleObj spid="_x0000_s1044" name="Packager Shell Object" showAsIcon="1" r:id="rId5" imgW="1837800" imgH="532800" progId="Package">
                   <p:embed/>
                 </p:oleObj>
               </mc:Choice>
               <mc:Fallback>
-                <p:oleObj name="Packager Shell Object" showAsIcon="1" r:id="rId4" imgW="1837800" imgH="532800" progId="Package">
+                <p:oleObj name="Packager Shell Object" showAsIcon="1" r:id="rId5" imgW="1837800" imgH="532800" progId="Package">
                   <p:embed/>
                   <p:pic>
                     <p:nvPicPr>
@@ -12996,14 +12844,14 @@
                       <p:nvPr/>
                     </p:nvPicPr>
                     <p:blipFill>
-                      <a:blip r:embed="rId5"/>
+                      <a:blip r:embed="rId6"/>
                       <a:stretch>
                         <a:fillRect/>
                       </a:stretch>
                     </p:blipFill>
                     <p:spPr>
                       <a:xfrm>
-                        <a:off x="92075" y="92075"/>
+                        <a:off x="5412221" y="1622597"/>
                         <a:ext cx="1838325" cy="533400"/>
                       </a:xfrm>
                       <a:prstGeom prst="rect">
@@ -14352,12 +14200,42 @@
           <a:p>
             <a:r>
               <a:rPr lang="en-US" sz="2400" b="1" dirty="0"/>
-              <a:t>Project Tile – [Thai Recipe Guidance]</a:t>
+              <a:t>Project Tile – [ Thai Recipe Guidance ]</a:t>
             </a:r>
             <a:endParaRPr lang="en-IN" sz="2400" b="1" dirty="0"/>
           </a:p>
         </p:txBody>
       </p:sp>
+      <p:pic>
+        <p:nvPicPr>
+          <p:cNvPr id="3" name="Picture 2">
+            <a:extLst>
+              <a:ext uri="{FF2B5EF4-FFF2-40B4-BE49-F238E27FC236}">
+                <a16:creationId xmlns:a16="http://schemas.microsoft.com/office/drawing/2014/main" id="{EBAA8D35-8D24-4E5C-B9DD-9DBD21ADA3A1}"/>
+              </a:ext>
+            </a:extLst>
+          </p:cNvPr>
+          <p:cNvPicPr>
+            <a:picLocks noChangeAspect="1"/>
+          </p:cNvPicPr>
+          <p:nvPr/>
+        </p:nvPicPr>
+        <p:blipFill>
+          <a:blip r:embed="rId3"/>
+          <a:stretch>
+            <a:fillRect/>
+          </a:stretch>
+        </p:blipFill>
+        <p:spPr>
+          <a:xfrm>
+            <a:off x="4095521" y="3640483"/>
+            <a:ext cx="808988" cy="913844"/>
+          </a:xfrm>
+          <a:prstGeom prst="rect">
+            <a:avLst/>
+          </a:prstGeom>
+        </p:spPr>
+      </p:pic>
     </p:spTree>
   </p:cSld>
   <p:clrMapOvr>
@@ -14817,7 +14695,7 @@
         <p:spPr>
           <a:xfrm>
             <a:off x="685800" y="1165753"/>
-            <a:ext cx="10607040" cy="2031325"/>
+            <a:ext cx="10607040" cy="1169551"/>
           </a:xfrm>
           <a:prstGeom prst="rect">
             <a:avLst/>
@@ -14848,15 +14726,7 @@
             <a:pPr fontAlgn="base"/>
             <a:r>
               <a:rPr lang="en-IN" dirty="0"/>
-              <a:t>Use </a:t>
-            </a:r>
-            <a:r>
-              <a:rPr lang="en-IN" b="1" dirty="0"/>
-              <a:t>any one</a:t>
-            </a:r>
-            <a:r>
-              <a:rPr lang="en-IN" dirty="0"/>
-              <a:t> of the following approaches: </a:t>
+              <a:t>I use the following approaches: </a:t>
             </a:r>
           </a:p>
           <a:p>
@@ -14875,24 +14745,6 @@
           </a:p>
           <a:p>
             <a:pPr fontAlgn="base"/>
-            <a:endParaRPr lang="en-IN" dirty="0"/>
-          </a:p>
-          <a:p>
-            <a:pPr marL="285750" indent="-285750" fontAlgn="base">
-              <a:buFont typeface="Arial" panose="020B0604020202020204" pitchFamily="34" charset="0"/>
-              <a:buChar char="•"/>
-            </a:pPr>
-            <a:endParaRPr lang="en-IN" dirty="0"/>
-          </a:p>
-          <a:p>
-            <a:pPr fontAlgn="base"/>
-            <a:endParaRPr lang="en-IN" dirty="0"/>
-          </a:p>
-          <a:p>
-            <a:pPr fontAlgn="base"/>
-            <a:endParaRPr lang="en-US" dirty="0"/>
-          </a:p>
-          <a:p>
             <a:endParaRPr lang="en-IN" dirty="0"/>
           </a:p>
         </p:txBody>
@@ -15824,7 +15676,7 @@
             </a:r>
             <a:r>
               <a:rPr lang="en-US" dirty="0"/>
-              <a:t>Stores and retrieves user data, meal logs, and nutritional datasets for analysis and tracking.</a:t>
+              <a:t>Stores and retrieves user data , meal logs, and ThaiRecipe.pdf file as a knowledge base for analysis and tracking.</a:t>
             </a:r>
           </a:p>
           <a:p>
@@ -15999,8 +15851,8 @@
         </p:blipFill>
         <p:spPr>
           <a:xfrm>
-            <a:off x="0" y="469776"/>
-            <a:ext cx="12192000" cy="5918447"/>
+            <a:off x="421226" y="674255"/>
+            <a:ext cx="11770773" cy="5713968"/>
           </a:xfrm>
           <a:prstGeom prst="rect">
             <a:avLst/>

--- a/Nitin Tripathi Project Submission.pptx
+++ b/Nitin Tripathi Project Submission.pptx
@@ -12457,7 +12457,7 @@
         <p:spPr>
           <a:xfrm>
             <a:off x="1218724" y="1153712"/>
-            <a:ext cx="9214580" cy="4277001"/>
+            <a:ext cx="9214580" cy="1774215"/>
           </a:xfrm>
           <a:prstGeom prst="rect">
             <a:avLst/>
@@ -12517,7 +12517,7 @@
                 <a:sym typeface="Times New Roman"/>
                 <a:hlinkClick r:id="rId4"/>
               </a:rPr>
-              <a:t>https://github.com/nitintripathi79/SRMIST_ThaiRecipe_NitinTripathi.git</a:t>
+              <a:t>https://github.com/nitintripathi79/SRMIST_ThaiRecipe_NitinTripathi</a:t>
             </a:r>
             <a:endParaRPr lang="en-US" sz="1850" dirty="0">
               <a:solidFill>
@@ -12549,7 +12549,89 @@
                 <a:cs typeface="Times New Roman"/>
                 <a:sym typeface="Times New Roman"/>
               </a:rPr>
-              <a:t> Json File -Thai </a:t>
+              <a:t>File Uploaded in </a:t>
+            </a:r>
+            <a:r>
+              <a:rPr lang="en-US" sz="1850" dirty="0" err="1">
+                <a:solidFill>
+                  <a:srgbClr val="2B3541"/>
+                </a:solidFill>
+                <a:latin typeface="Times New Roman"/>
+                <a:ea typeface="Times New Roman"/>
+                <a:cs typeface="Times New Roman"/>
+                <a:sym typeface="Times New Roman"/>
+              </a:rPr>
+              <a:t>Github</a:t>
+            </a:r>
+            <a:endParaRPr lang="en-US" sz="1850" dirty="0">
+              <a:solidFill>
+                <a:srgbClr val="2B3541"/>
+              </a:solidFill>
+              <a:latin typeface="Times New Roman"/>
+              <a:cs typeface="Times New Roman"/>
+              <a:sym typeface="Times New Roman"/>
+            </a:endParaRPr>
+          </a:p>
+          <a:p>
+            <a:pPr lvl="0">
+              <a:lnSpc>
+                <a:spcPct val="162162"/>
+              </a:lnSpc>
+              <a:buClr>
+                <a:srgbClr val="2B3541"/>
+              </a:buClr>
+              <a:buSzPts val="1850"/>
+            </a:pPr>
+            <a:r>
+              <a:rPr lang="en-US" sz="1850" dirty="0">
+                <a:solidFill>
+                  <a:srgbClr val="2B3541"/>
+                </a:solidFill>
+                <a:latin typeface="Times New Roman"/>
+                <a:cs typeface="Times New Roman"/>
+                <a:hlinkClick r:id="rId5" tooltip="Nitin Tripathi Certificate.pdf">
+                  <a:extLst>
+                    <a:ext uri="{A12FA001-AC4F-418D-AE19-62706E023703}">
+                      <ahyp:hlinkClr xmlns:ahyp="http://schemas.microsoft.com/office/drawing/2018/hyperlinkcolor" val="tx"/>
+                    </a:ext>
+                  </a:extLst>
+                </a:hlinkClick>
+              </a:rPr>
+              <a:t>Nitin Tripathi Certificate.pdf</a:t>
+            </a:r>
+            <a:r>
+              <a:rPr lang="en-US" sz="1850" dirty="0">
+                <a:solidFill>
+                  <a:srgbClr val="2B3541"/>
+                </a:solidFill>
+                <a:latin typeface="Times New Roman"/>
+                <a:cs typeface="Times New Roman"/>
+                <a:sym typeface="Times New Roman"/>
+              </a:rPr>
+              <a:t> </a:t>
+            </a:r>
+          </a:p>
+          <a:p>
+            <a:pPr lvl="0">
+              <a:lnSpc>
+                <a:spcPct val="162162"/>
+              </a:lnSpc>
+              <a:buClr>
+                <a:srgbClr val="2B3541"/>
+              </a:buClr>
+              <a:buSzPts val="1850"/>
+            </a:pPr>
+            <a:r>
+              <a:rPr lang="en-US" sz="1850" dirty="0">
+                <a:solidFill>
+                  <a:srgbClr val="2B3541"/>
+                </a:solidFill>
+                <a:latin typeface="Times New Roman"/>
+                <a:ea typeface="Times New Roman"/>
+                <a:cs typeface="Times New Roman"/>
+                <a:sym typeface="Times New Roman"/>
+              </a:rPr>
+              <a:t>Json File -Thai </a:t>
             </a:r>
             <a:r>
               <a:rPr lang="en-US" sz="1850" dirty="0" err="1">
@@ -12620,31 +12702,7 @@
                 <a:cs typeface="Times New Roman"/>
                 <a:sym typeface="Times New Roman"/>
               </a:rPr>
-              <a:t> </a:t>
-            </a:r>
-            <a:r>
-              <a:rPr lang="en-US" sz="1850" dirty="0" err="1">
-                <a:solidFill>
-                  <a:srgbClr val="2B3541"/>
-                </a:solidFill>
-                <a:latin typeface="Times New Roman"/>
-                <a:ea typeface="Times New Roman"/>
-                <a:cs typeface="Times New Roman"/>
-                <a:sym typeface="Times New Roman"/>
-              </a:rPr>
-              <a:t>powerpoint</a:t>
-            </a:r>
-            <a:r>
-              <a:rPr lang="en-US" sz="1850" dirty="0">
-                <a:solidFill>
-                  <a:srgbClr val="2B3541"/>
-                </a:solidFill>
-                <a:latin typeface="Times New Roman"/>
-                <a:ea typeface="Times New Roman"/>
-                <a:cs typeface="Times New Roman"/>
-                <a:sym typeface="Times New Roman"/>
-              </a:rPr>
-              <a:t> presentation Nitin Tripathi Project Submission.pptx</a:t>
+              <a:t> Power point presentation:- Nitin Tripathi Project Submission.pptx</a:t>
             </a:r>
             <a:endParaRPr lang="en-US" sz="1850" b="0" i="0" u="none" strike="noStrike" cap="none" dirty="0">
               <a:solidFill>
@@ -12830,12 +12888,12 @@
           <a:graphicData uri="http://schemas.openxmlformats.org/presentationml/2006/ole">
             <mc:AlternateContent xmlns:mc="http://schemas.openxmlformats.org/markup-compatibility/2006">
               <mc:Choice xmlns:v="urn:schemas-microsoft-com:vml" Requires="v">
-                <p:oleObj spid="_x0000_s1044" name="Packager Shell Object" showAsIcon="1" r:id="rId5" imgW="1837800" imgH="532800" progId="Package">
+                <p:oleObj spid="_x0000_s1046" name="Packager Shell Object" showAsIcon="1" r:id="rId6" imgW="1837800" imgH="532800" progId="Package">
                   <p:embed/>
                 </p:oleObj>
               </mc:Choice>
               <mc:Fallback>
-                <p:oleObj name="Packager Shell Object" showAsIcon="1" r:id="rId5" imgW="1837800" imgH="532800" progId="Package">
+                <p:oleObj name="Packager Shell Object" showAsIcon="1" r:id="rId6" imgW="1837800" imgH="532800" progId="Package">
                   <p:embed/>
                   <p:pic>
                     <p:nvPicPr>
@@ -12844,7 +12902,7 @@
                       <p:nvPr/>
                     </p:nvPicPr>
                     <p:blipFill>
-                      <a:blip r:embed="rId6"/>
+                      <a:blip r:embed="rId7"/>
                       <a:stretch>
                         <a:fillRect/>
                       </a:stretch>
